--- a/midpoint_slides.pptx
+++ b/midpoint_slides.pptx
@@ -110,13 +110,18 @@
       </a:defRPr>
     </a:lvl9pPr>
   </p:defaultTextStyle>
+  <p:extLst>
+    <p:ext uri="{EFAFB233-063F-42B5-8137-9DF3F51BA10A}">
+      <p15:sldGuideLst xmlns:p15="http://schemas.microsoft.com/office/powerpoint/2012/main"/>
+    </p:ext>
+  </p:extLst>
 </p:presentation>
 </file>
 
 <file path=ppt/revisionInfo.xml><?xml version="1.0" encoding="utf-8"?>
 <p1510:revInfo xmlns:a="http://schemas.openxmlformats.org/drawingml/2006/main" xmlns:r="http://schemas.openxmlformats.org/officeDocument/2006/relationships" xmlns:p1510="http://schemas.microsoft.com/office/powerpoint/2015/10/main">
   <p1510:revLst>
-    <p1510:client id="{31B818EF-A92C-4179-9082-6F48CC1740DE}" v="2" dt="2026-06-15T13:57:49.385"/>
+    <p1510:client id="{31B818EF-A92C-4179-9082-6F48CC1740DE}" v="1" dt="2026-06-29T10:17:59.321"/>
   </p1510:revLst>
 </p1510:revInfo>
 </file>
@@ -126,18 +131,18 @@
   <pc:docChgLst>
     <pc:chgData name="Marsh, Liz" userId="b5bbfa31-01ef-4681-bb0b-9984dfbf5bf8" providerId="ADAL" clId="{F8E8203D-0CBE-4A0C-977F-F9026FD56D39}"/>
     <pc:docChg chg="undo custSel addSld modSld">
-      <pc:chgData name="Marsh, Liz" userId="b5bbfa31-01ef-4681-bb0b-9984dfbf5bf8" providerId="ADAL" clId="{F8E8203D-0CBE-4A0C-977F-F9026FD56D39}" dt="2026-06-15T14:48:55.021" v="4290" actId="20577"/>
+      <pc:chgData name="Marsh, Liz" userId="b5bbfa31-01ef-4681-bb0b-9984dfbf5bf8" providerId="ADAL" clId="{F8E8203D-0CBE-4A0C-977F-F9026FD56D39}" dt="2026-06-29T10:35:16.498" v="4832" actId="20577"/>
       <pc:docMkLst>
         <pc:docMk/>
       </pc:docMkLst>
       <pc:sldChg chg="modSp mod">
-        <pc:chgData name="Marsh, Liz" userId="b5bbfa31-01ef-4681-bb0b-9984dfbf5bf8" providerId="ADAL" clId="{F8E8203D-0CBE-4A0C-977F-F9026FD56D39}" dt="2026-06-15T14:34:37.553" v="3145" actId="14100"/>
+        <pc:chgData name="Marsh, Liz" userId="b5bbfa31-01ef-4681-bb0b-9984dfbf5bf8" providerId="ADAL" clId="{F8E8203D-0CBE-4A0C-977F-F9026FD56D39}" dt="2026-06-29T10:16:22.301" v="4329" actId="20577"/>
         <pc:sldMkLst>
           <pc:docMk/>
           <pc:sldMk cId="254394778" sldId="256"/>
         </pc:sldMkLst>
         <pc:spChg chg="mod">
-          <ac:chgData name="Marsh, Liz" userId="b5bbfa31-01ef-4681-bb0b-9984dfbf5bf8" providerId="ADAL" clId="{F8E8203D-0CBE-4A0C-977F-F9026FD56D39}" dt="2026-06-15T13:58:06.071" v="12" actId="404"/>
+          <ac:chgData name="Marsh, Liz" userId="b5bbfa31-01ef-4681-bb0b-9984dfbf5bf8" providerId="ADAL" clId="{F8E8203D-0CBE-4A0C-977F-F9026FD56D39}" dt="2026-06-29T10:16:22.301" v="4329" actId="20577"/>
           <ac:spMkLst>
             <pc:docMk/>
             <pc:sldMk cId="254394778" sldId="256"/>
@@ -154,7 +159,7 @@
         </pc:spChg>
       </pc:sldChg>
       <pc:sldChg chg="modSp new mod modNotesTx">
-        <pc:chgData name="Marsh, Liz" userId="b5bbfa31-01ef-4681-bb0b-9984dfbf5bf8" providerId="ADAL" clId="{F8E8203D-0CBE-4A0C-977F-F9026FD56D39}" dt="2026-06-15T14:48:55.021" v="4290" actId="20577"/>
+        <pc:chgData name="Marsh, Liz" userId="b5bbfa31-01ef-4681-bb0b-9984dfbf5bf8" providerId="ADAL" clId="{F8E8203D-0CBE-4A0C-977F-F9026FD56D39}" dt="2026-06-29T10:14:50.327" v="4295" actId="20577"/>
         <pc:sldMkLst>
           <pc:docMk/>
           <pc:sldMk cId="838897575" sldId="257"/>
@@ -168,7 +173,7 @@
           </ac:spMkLst>
         </pc:spChg>
         <pc:spChg chg="mod">
-          <ac:chgData name="Marsh, Liz" userId="b5bbfa31-01ef-4681-bb0b-9984dfbf5bf8" providerId="ADAL" clId="{F8E8203D-0CBE-4A0C-977F-F9026FD56D39}" dt="2026-06-15T14:16:30.187" v="842" actId="20577"/>
+          <ac:chgData name="Marsh, Liz" userId="b5bbfa31-01ef-4681-bb0b-9984dfbf5bf8" providerId="ADAL" clId="{F8E8203D-0CBE-4A0C-977F-F9026FD56D39}" dt="2026-06-29T10:14:50.327" v="4295" actId="20577"/>
           <ac:spMkLst>
             <pc:docMk/>
             <pc:sldMk cId="838897575" sldId="257"/>
@@ -177,7 +182,7 @@
         </pc:spChg>
       </pc:sldChg>
       <pc:sldChg chg="modSp new mod modNotesTx">
-        <pc:chgData name="Marsh, Liz" userId="b5bbfa31-01ef-4681-bb0b-9984dfbf5bf8" providerId="ADAL" clId="{F8E8203D-0CBE-4A0C-977F-F9026FD56D39}" dt="2026-06-15T14:38:44.648" v="3285" actId="20577"/>
+        <pc:chgData name="Marsh, Liz" userId="b5bbfa31-01ef-4681-bb0b-9984dfbf5bf8" providerId="ADAL" clId="{F8E8203D-0CBE-4A0C-977F-F9026FD56D39}" dt="2026-06-29T10:35:16.498" v="4832" actId="20577"/>
         <pc:sldMkLst>
           <pc:docMk/>
           <pc:sldMk cId="2662551942" sldId="258"/>
@@ -191,7 +196,7 @@
           </ac:spMkLst>
         </pc:spChg>
         <pc:spChg chg="mod">
-          <ac:chgData name="Marsh, Liz" userId="b5bbfa31-01ef-4681-bb0b-9984dfbf5bf8" providerId="ADAL" clId="{F8E8203D-0CBE-4A0C-977F-F9026FD56D39}" dt="2026-06-15T14:38:44.648" v="3285" actId="20577"/>
+          <ac:chgData name="Marsh, Liz" userId="b5bbfa31-01ef-4681-bb0b-9984dfbf5bf8" providerId="ADAL" clId="{F8E8203D-0CBE-4A0C-977F-F9026FD56D39}" dt="2026-06-29T10:35:16.498" v="4832" actId="20577"/>
           <ac:spMkLst>
             <pc:docMk/>
             <pc:sldMk cId="2662551942" sldId="258"/>
@@ -200,13 +205,13 @@
         </pc:spChg>
       </pc:sldChg>
       <pc:sldChg chg="modSp new mod">
-        <pc:chgData name="Marsh, Liz" userId="b5bbfa31-01ef-4681-bb0b-9984dfbf5bf8" providerId="ADAL" clId="{F8E8203D-0CBE-4A0C-977F-F9026FD56D39}" dt="2026-06-15T14:34:20.523" v="3144" actId="20577"/>
+        <pc:chgData name="Marsh, Liz" userId="b5bbfa31-01ef-4681-bb0b-9984dfbf5bf8" providerId="ADAL" clId="{F8E8203D-0CBE-4A0C-977F-F9026FD56D39}" dt="2026-06-29T10:21:53.082" v="4441" actId="20577"/>
         <pc:sldMkLst>
           <pc:docMk/>
           <pc:sldMk cId="3255706205" sldId="259"/>
         </pc:sldMkLst>
         <pc:spChg chg="mod">
-          <ac:chgData name="Marsh, Liz" userId="b5bbfa31-01ef-4681-bb0b-9984dfbf5bf8" providerId="ADAL" clId="{F8E8203D-0CBE-4A0C-977F-F9026FD56D39}" dt="2026-06-15T14:34:20.523" v="3144" actId="20577"/>
+          <ac:chgData name="Marsh, Liz" userId="b5bbfa31-01ef-4681-bb0b-9984dfbf5bf8" providerId="ADAL" clId="{F8E8203D-0CBE-4A0C-977F-F9026FD56D39}" dt="2026-06-29T10:21:53.082" v="4441" actId="20577"/>
           <ac:spMkLst>
             <pc:docMk/>
             <pc:sldMk cId="3255706205" sldId="259"/>
@@ -301,7 +306,7 @@
           <a:p>
             <a:fld id="{E01F1383-9238-4812-92A0-F04321BD05C0}" type="datetimeFigureOut">
               <a:rPr lang="en-GB" smtClean="0"/>
-              <a:t>15/06/2026</a:t>
+              <a:t>29/06/2026</a:t>
             </a:fld>
             <a:endParaRPr lang="en-GB"/>
           </a:p>
@@ -755,7 +760,7 @@
           <a:p>
             <a:r>
               <a:rPr lang="en-US" dirty="0"/>
-              <a:t>I therefore landed on this selection of biases, the first of these being one of the most interesting to me and most discussed in the literature. The relative age effect simply refers to the preference for children born towards the start of the selection year. In the UK our system is obviously set-up so that the start of the year is September, so you will often find an over-representation of kids born in September, October, November in high-level sports teams, which is largely down to maturational differences. Older kids simply tend to be more physically mature and therefore faster, stronger, taller etc.</a:t>
+              <a:t>I therefore landed on this set of possible biases, the first of these being one of the most interesting to me and most discussed in the literature. The relative age effect simply refers to the preference for children born towards the start of the selection year. In the UK our system is obviously set-up so that the start of the year is September, so you will often find an over-representation of kids born in September, October, November in high-level sports teams, which is largely down to maturational differences. Older kids simply tend to be more physically mature and therefore faster, stronger, taller etc.</a:t>
             </a:r>
           </a:p>
           <a:p>
@@ -968,7 +973,7 @@
           <a:p>
             <a:fld id="{84BD6EB6-A736-4805-9C2A-D4103E0968D8}" type="datetimeFigureOut">
               <a:rPr lang="en-GB" smtClean="0"/>
-              <a:t>15/06/2026</a:t>
+              <a:t>29/06/2026</a:t>
             </a:fld>
             <a:endParaRPr lang="en-GB"/>
           </a:p>
@@ -1168,7 +1173,7 @@
           <a:p>
             <a:fld id="{84BD6EB6-A736-4805-9C2A-D4103E0968D8}" type="datetimeFigureOut">
               <a:rPr lang="en-GB" smtClean="0"/>
-              <a:t>15/06/2026</a:t>
+              <a:t>29/06/2026</a:t>
             </a:fld>
             <a:endParaRPr lang="en-GB"/>
           </a:p>
@@ -1378,7 +1383,7 @@
           <a:p>
             <a:fld id="{84BD6EB6-A736-4805-9C2A-D4103E0968D8}" type="datetimeFigureOut">
               <a:rPr lang="en-GB" smtClean="0"/>
-              <a:t>15/06/2026</a:t>
+              <a:t>29/06/2026</a:t>
             </a:fld>
             <a:endParaRPr lang="en-GB"/>
           </a:p>
@@ -1578,7 +1583,7 @@
           <a:p>
             <a:fld id="{84BD6EB6-A736-4805-9C2A-D4103E0968D8}" type="datetimeFigureOut">
               <a:rPr lang="en-GB" smtClean="0"/>
-              <a:t>15/06/2026</a:t>
+              <a:t>29/06/2026</a:t>
             </a:fld>
             <a:endParaRPr lang="en-GB"/>
           </a:p>
@@ -1854,7 +1859,7 @@
           <a:p>
             <a:fld id="{84BD6EB6-A736-4805-9C2A-D4103E0968D8}" type="datetimeFigureOut">
               <a:rPr lang="en-GB" smtClean="0"/>
-              <a:t>15/06/2026</a:t>
+              <a:t>29/06/2026</a:t>
             </a:fld>
             <a:endParaRPr lang="en-GB"/>
           </a:p>
@@ -2122,7 +2127,7 @@
           <a:p>
             <a:fld id="{84BD6EB6-A736-4805-9C2A-D4103E0968D8}" type="datetimeFigureOut">
               <a:rPr lang="en-GB" smtClean="0"/>
-              <a:t>15/06/2026</a:t>
+              <a:t>29/06/2026</a:t>
             </a:fld>
             <a:endParaRPr lang="en-GB"/>
           </a:p>
@@ -2537,7 +2542,7 @@
           <a:p>
             <a:fld id="{84BD6EB6-A736-4805-9C2A-D4103E0968D8}" type="datetimeFigureOut">
               <a:rPr lang="en-GB" smtClean="0"/>
-              <a:t>15/06/2026</a:t>
+              <a:t>29/06/2026</a:t>
             </a:fld>
             <a:endParaRPr lang="en-GB"/>
           </a:p>
@@ -2679,7 +2684,7 @@
           <a:p>
             <a:fld id="{84BD6EB6-A736-4805-9C2A-D4103E0968D8}" type="datetimeFigureOut">
               <a:rPr lang="en-GB" smtClean="0"/>
-              <a:t>15/06/2026</a:t>
+              <a:t>29/06/2026</a:t>
             </a:fld>
             <a:endParaRPr lang="en-GB"/>
           </a:p>
@@ -2792,7 +2797,7 @@
           <a:p>
             <a:fld id="{84BD6EB6-A736-4805-9C2A-D4103E0968D8}" type="datetimeFigureOut">
               <a:rPr lang="en-GB" smtClean="0"/>
-              <a:t>15/06/2026</a:t>
+              <a:t>29/06/2026</a:t>
             </a:fld>
             <a:endParaRPr lang="en-GB"/>
           </a:p>
@@ -3105,7 +3110,7 @@
           <a:p>
             <a:fld id="{84BD6EB6-A736-4805-9C2A-D4103E0968D8}" type="datetimeFigureOut">
               <a:rPr lang="en-GB" smtClean="0"/>
-              <a:t>15/06/2026</a:t>
+              <a:t>29/06/2026</a:t>
             </a:fld>
             <a:endParaRPr lang="en-GB"/>
           </a:p>
@@ -3394,7 +3399,7 @@
           <a:p>
             <a:fld id="{84BD6EB6-A736-4805-9C2A-D4103E0968D8}" type="datetimeFigureOut">
               <a:rPr lang="en-GB" smtClean="0"/>
-              <a:t>15/06/2026</a:t>
+              <a:t>29/06/2026</a:t>
             </a:fld>
             <a:endParaRPr lang="en-GB"/>
           </a:p>
@@ -3637,7 +3642,7 @@
           <a:p>
             <a:fld id="{84BD6EB6-A736-4805-9C2A-D4103E0968D8}" type="datetimeFigureOut">
               <a:rPr lang="en-GB" smtClean="0"/>
-              <a:t>15/06/2026</a:t>
+              <a:t>29/06/2026</a:t>
             </a:fld>
             <a:endParaRPr lang="en-GB"/>
           </a:p>
@@ -4079,7 +4084,7 @@
           <a:p>
             <a:r>
               <a:rPr lang="en-US" sz="3600" dirty="0"/>
-              <a:t>To what extent are “selection biases” present in the recruitment of adolescent Track and Field (Athletics) athletes onto England Athletics’ Youth Talent </a:t>
+              <a:t>To What Extent Are ‘Selection Biases’ Present in the Recruitment of Adolescent Track and Field (Athletics) Athletes Onto England Athletics’ Youth Talent </a:t>
             </a:r>
             <a:r>
               <a:rPr lang="en-US" sz="3600" dirty="0" err="1"/>
@@ -4087,7 +4092,7 @@
             </a:r>
             <a:r>
               <a:rPr lang="en-US" sz="3600" dirty="0"/>
-              <a:t> between 2021 and 2025? </a:t>
+              <a:t> Between 2021 and 2025? </a:t>
             </a:r>
             <a:endParaRPr lang="en-GB" sz="3600" dirty="0"/>
           </a:p>
@@ -4253,7 +4258,7 @@
           <a:p>
             <a:r>
               <a:rPr lang="en-GB" dirty="0"/>
-              <a:t>Proposed question about whether there are selection biases present that impact the likelihood of selection </a:t>
+              <a:t>Proposed question about whether there are any biases present that impact the likelihood of selection </a:t>
             </a:r>
           </a:p>
           <a:p>
@@ -4347,7 +4352,9 @@
         </p:nvSpPr>
         <p:spPr/>
         <p:txBody>
-          <a:bodyPr/>
+          <a:bodyPr>
+            <a:normAutofit lnSpcReduction="10000"/>
+          </a:bodyPr>
           <a:lstStyle/>
           <a:p>
             <a:r>
@@ -4358,17 +4365,26 @@
           <a:p>
             <a:pPr lvl="1"/>
             <a:r>
-              <a:rPr lang="en-US" dirty="0"/>
-              <a:t>Young sportspeople born towards the start of a selection year more likely to be selected due to differences in maturity</a:t>
-            </a:r>
-            <a:endParaRPr lang="en-GB" dirty="0"/>
-          </a:p>
-          <a:p>
-            <a:pPr lvl="1"/>
-            <a:r>
               <a:rPr lang="en-GB" dirty="0"/>
               <a:t>Large amount of talent identification literature focuses on this effect</a:t>
             </a:r>
+            <a:endParaRPr lang="en-US" dirty="0"/>
+          </a:p>
+          <a:p>
+            <a:pPr lvl="1"/>
+            <a:r>
+              <a:rPr lang="en-US" dirty="0"/>
+              <a:t>Young sportspeople born towards the start of a selection year more likely to be selected due to differences in maturity (e.g. </a:t>
+            </a:r>
+            <a:r>
+              <a:rPr lang="en-US" dirty="0" err="1"/>
+              <a:t>Sedeaud</a:t>
+            </a:r>
+            <a:r>
+              <a:rPr lang="en-US" dirty="0"/>
+              <a:t> et al., 2025)</a:t>
+            </a:r>
+            <a:endParaRPr lang="en-GB" dirty="0"/>
           </a:p>
           <a:p>
             <a:r>
@@ -4384,14 +4400,28 @@
             </a:r>
           </a:p>
           <a:p>
+            <a:r>
+              <a:rPr lang="en-GB" dirty="0"/>
+              <a:t>Gender bias</a:t>
+            </a:r>
+          </a:p>
+          <a:p>
             <a:pPr lvl="1"/>
-            <a:endParaRPr lang="en-GB" dirty="0"/>
+            <a:r>
+              <a:rPr lang="en-GB" dirty="0"/>
+              <a:t>Not particularly well studied due to usual separation of male and female sports teams and severe underrepresentation of girls in talent identification literature (Curran et al., 2019)</a:t>
+            </a:r>
           </a:p>
           <a:p>
             <a:pPr lvl="1"/>
-            <a:endParaRPr lang="en-GB" dirty="0"/>
-          </a:p>
-          <a:p>
+            <a:r>
+              <a:rPr lang="en-GB" dirty="0"/>
+              <a:t>The YTP does not separate by gender </a:t>
+            </a:r>
+            <a:r>
+              <a:rPr lang="en-GB"/>
+              <a:t>and doesn’t </a:t>
+            </a:r>
             <a:endParaRPr lang="en-GB" dirty="0"/>
           </a:p>
           <a:p>
@@ -4455,7 +4485,7 @@
           <a:p>
             <a:r>
               <a:rPr lang="en-US" dirty="0"/>
-              <a:t>Literature</a:t>
+              <a:t>Methods</a:t>
             </a:r>
             <a:endParaRPr lang="en-GB" dirty="0"/>
           </a:p>
@@ -4482,7 +4512,7 @@
           <a:bodyPr/>
           <a:lstStyle/>
           <a:p>
-            <a:endParaRPr lang="en-GB"/>
+            <a:endParaRPr lang="en-GB" dirty="0"/>
           </a:p>
         </p:txBody>
       </p:sp>

--- a/midpoint_slides.pptx
+++ b/midpoint_slides.pptx
@@ -132,18 +132,18 @@
   <pc:docChgLst>
     <pc:chgData name="Marsh, Liz" userId="b5bbfa31-01ef-4681-bb0b-9984dfbf5bf8" providerId="ADAL" clId="{F8E8203D-0CBE-4A0C-977F-F9026FD56D39}"/>
     <pc:docChg chg="undo custSel addSld delSld modSld">
-      <pc:chgData name="Marsh, Liz" userId="b5bbfa31-01ef-4681-bb0b-9984dfbf5bf8" providerId="ADAL" clId="{F8E8203D-0CBE-4A0C-977F-F9026FD56D39}" dt="2026-06-29T15:48:48.429" v="13484" actId="20577"/>
+      <pc:chgData name="Marsh, Liz" userId="b5bbfa31-01ef-4681-bb0b-9984dfbf5bf8" providerId="ADAL" clId="{F8E8203D-0CBE-4A0C-977F-F9026FD56D39}" dt="2026-06-30T12:23:34.657" v="13695" actId="20577"/>
       <pc:docMkLst>
         <pc:docMk/>
       </pc:docMkLst>
       <pc:sldChg chg="addSp delSp modSp mod setBg addAnim modAnim">
-        <pc:chgData name="Marsh, Liz" userId="b5bbfa31-01ef-4681-bb0b-9984dfbf5bf8" providerId="ADAL" clId="{F8E8203D-0CBE-4A0C-977F-F9026FD56D39}" dt="2026-06-29T14:18:01.925" v="7133"/>
+        <pc:chgData name="Marsh, Liz" userId="b5bbfa31-01ef-4681-bb0b-9984dfbf5bf8" providerId="ADAL" clId="{F8E8203D-0CBE-4A0C-977F-F9026FD56D39}" dt="2026-06-30T12:13:28.365" v="13634" actId="20577"/>
         <pc:sldMkLst>
           <pc:docMk/>
           <pc:sldMk cId="254394778" sldId="256"/>
         </pc:sldMkLst>
         <pc:spChg chg="mod">
-          <ac:chgData name="Marsh, Liz" userId="b5bbfa31-01ef-4681-bb0b-9984dfbf5bf8" providerId="ADAL" clId="{F8E8203D-0CBE-4A0C-977F-F9026FD56D39}" dt="2026-06-29T13:12:29.603" v="6095" actId="26606"/>
+          <ac:chgData name="Marsh, Liz" userId="b5bbfa31-01ef-4681-bb0b-9984dfbf5bf8" providerId="ADAL" clId="{F8E8203D-0CBE-4A0C-977F-F9026FD56D39}" dt="2026-06-30T12:13:28.365" v="13634" actId="20577"/>
           <ac:spMkLst>
             <pc:docMk/>
             <pc:sldMk cId="254394778" sldId="256"/>
@@ -320,7 +320,7 @@
         </pc:picChg>
       </pc:sldChg>
       <pc:sldChg chg="addSp delSp modSp new mod setBg setClrOvrMap modNotesTx">
-        <pc:chgData name="Marsh, Liz" userId="b5bbfa31-01ef-4681-bb0b-9984dfbf5bf8" providerId="ADAL" clId="{F8E8203D-0CBE-4A0C-977F-F9026FD56D39}" dt="2026-06-29T15:43:11.079" v="13309" actId="20577"/>
+        <pc:chgData name="Marsh, Liz" userId="b5bbfa31-01ef-4681-bb0b-9984dfbf5bf8" providerId="ADAL" clId="{F8E8203D-0CBE-4A0C-977F-F9026FD56D39}" dt="2026-06-30T12:19:53.208" v="13656" actId="20577"/>
         <pc:sldMkLst>
           <pc:docMk/>
           <pc:sldMk cId="838897575" sldId="257"/>
@@ -525,7 +525,7 @@
         </pc:picChg>
       </pc:sldChg>
       <pc:sldChg chg="addSp delSp modSp new mod modNotesTx">
-        <pc:chgData name="Marsh, Liz" userId="b5bbfa31-01ef-4681-bb0b-9984dfbf5bf8" providerId="ADAL" clId="{F8E8203D-0CBE-4A0C-977F-F9026FD56D39}" dt="2026-06-29T15:47:05.266" v="13435" actId="20577"/>
+        <pc:chgData name="Marsh, Liz" userId="b5bbfa31-01ef-4681-bb0b-9984dfbf5bf8" providerId="ADAL" clId="{F8E8203D-0CBE-4A0C-977F-F9026FD56D39}" dt="2026-06-30T12:21:52.625" v="13672" actId="20577"/>
         <pc:sldMkLst>
           <pc:docMk/>
           <pc:sldMk cId="3201357187" sldId="260"/>
@@ -579,7 +579,7 @@
         </pc:picChg>
       </pc:sldChg>
       <pc:sldChg chg="addSp delSp modSp new mod modNotesTx">
-        <pc:chgData name="Marsh, Liz" userId="b5bbfa31-01ef-4681-bb0b-9984dfbf5bf8" providerId="ADAL" clId="{F8E8203D-0CBE-4A0C-977F-F9026FD56D39}" dt="2026-06-29T15:47:36.711" v="13440" actId="20577"/>
+        <pc:chgData name="Marsh, Liz" userId="b5bbfa31-01ef-4681-bb0b-9984dfbf5bf8" providerId="ADAL" clId="{F8E8203D-0CBE-4A0C-977F-F9026FD56D39}" dt="2026-06-30T12:23:04.778" v="13692" actId="20577"/>
         <pc:sldMkLst>
           <pc:docMk/>
           <pc:sldMk cId="2235741291" sldId="262"/>
@@ -625,7 +625,7 @@
         </pc:sldMkLst>
       </pc:sldChg>
       <pc:sldChg chg="addSp delSp modSp new mod modNotesTx">
-        <pc:chgData name="Marsh, Liz" userId="b5bbfa31-01ef-4681-bb0b-9984dfbf5bf8" providerId="ADAL" clId="{F8E8203D-0CBE-4A0C-977F-F9026FD56D39}" dt="2026-06-29T15:48:48.429" v="13484" actId="20577"/>
+        <pc:chgData name="Marsh, Liz" userId="b5bbfa31-01ef-4681-bb0b-9984dfbf5bf8" providerId="ADAL" clId="{F8E8203D-0CBE-4A0C-977F-F9026FD56D39}" dt="2026-06-30T12:23:34.657" v="13695" actId="20577"/>
         <pc:sldMkLst>
           <pc:docMk/>
           <pc:sldMk cId="3182123481" sldId="263"/>
@@ -3774,7 +3774,7 @@
           <a:p>
             <a:fld id="{E01F1383-9238-4812-92A0-F04321BD05C0}" type="datetimeFigureOut">
               <a:rPr lang="en-GB" smtClean="0"/>
-              <a:t>29/06/2026</a:t>
+              <a:t>30/06/2026</a:t>
             </a:fld>
             <a:endParaRPr lang="en-GB"/>
           </a:p>
@@ -4088,7 +4088,7 @@
           <a:p>
             <a:r>
               <a:rPr lang="en-US" dirty="0"/>
-              <a:t>So, for this project I was presented with a dataset from England Athletics which had lots of information about applicants to a Youth Talent </a:t>
+              <a:t>So, for this project I was presented with a dataset from England Athletics which has lots of information on applicants to a Youth Talent </a:t>
             </a:r>
             <a:r>
               <a:rPr lang="en-US" dirty="0" err="1"/>
@@ -4096,15 +4096,16 @@
             </a:r>
             <a:r>
               <a:rPr lang="en-US" dirty="0"/>
-              <a:t>. This program is designed for talented 16-18 year old athletes in England from a range of track and field disciplines. To apply, each of them had to fill out an application form that was created in partnership with the Uni. This form has questions relating to </a:t>
-            </a:r>
-            <a:r>
-              <a:rPr lang="en-US" dirty="0" err="1"/>
-              <a:t>sociodemographics</a:t>
-            </a:r>
+              <a:t>. This program is designed for 16-18 year old athletes in England from a range of track and field disciplines. To apply, each of them had to fill out an application form that was created in partnership with the Uni. This form has questions relating to socio-demographics as well as more sport-specific questions and the dataset itself has all this information in addition to selection outcome.</a:t>
+            </a:r>
+          </a:p>
+          <a:p>
+            <a:endParaRPr lang="en-US" dirty="0"/>
+          </a:p>
+          <a:p>
             <a:r>
               <a:rPr lang="en-US" dirty="0"/>
-              <a:t> as well as more sport-specific questions and the dataset itself has all this information in addition to selection outcome.</a:t>
+              <a:t>Eventually I should be getting data from each application year from 2021-2025 but currently I’m only working with 2021 and 2022.</a:t>
             </a:r>
           </a:p>
           <a:p>
@@ -4121,16 +4122,7 @@
             </a:r>
             <a:r>
               <a:rPr lang="en-US" dirty="0"/>
-              <a:t>. However, this data is very new and currently completely unused so there is a strong emphasis on the reproducibility and readability of my code for use in future projects and research. </a:t>
-            </a:r>
-          </a:p>
-          <a:p>
-            <a:endParaRPr lang="en-US" dirty="0"/>
-          </a:p>
-          <a:p>
-            <a:r>
-              <a:rPr lang="en-US" dirty="0"/>
-              <a:t>It also means that any finding is very interesting especially to EA.</a:t>
+              <a:t>. However, this data is very new and currently completely unused so there is a strong emphasis on the reproducibility and readability of my code for use in future projects and research.  But it does also means that any finding is  interesting especially to EA.</a:t>
             </a:r>
           </a:p>
           <a:p>
@@ -4220,7 +4212,7 @@
           <a:p>
             <a:r>
               <a:rPr lang="en-US" dirty="0"/>
-              <a:t>Initially I was given a very long list of selection biases but due to scope and time constraints I had to narrow this down. From my own personal interests, I was most interested in the socio-demographic side of things rather than the sport-performance side of things. I therefore settled on this set of biases here.</a:t>
+              <a:t>Initially I was given a very long list of selection biases but due to scope and time constraints I had to narrow this down. From my own interests, I was most interested in the socio-demographic side of things rather than the sport-performance side. So I settled on this set of biases here.</a:t>
             </a:r>
           </a:p>
           <a:p>
@@ -4254,7 +4246,7 @@
             </a:r>
             <a:r>
               <a:rPr lang="en-US" dirty="0"/>
-              <a:t> takes place. They want to see whether the distribution of applicants changes based on what </a:t>
+              <a:t> takes place. They want to see whether the distribution of applicants' changes based on what </a:t>
             </a:r>
             <a:r>
               <a:rPr lang="en-US" dirty="0" err="1"/>
@@ -4262,7 +4254,7 @@
             </a:r>
             <a:r>
               <a:rPr lang="en-US" dirty="0"/>
-              <a:t> are available at the time, and just generally if there is patterning to applicants’ locations. Given the newness of this dataset, I’m not expecting anything in particular as literature is not really present here.</a:t>
+              <a:t> are available at the time, and just generally if there is patterning to applicants’ locations. Given the newness of this dataset, I’m not expecting anything, as literature is not really present here.</a:t>
             </a:r>
           </a:p>
           <a:p>
@@ -4271,7 +4263,7 @@
           <a:p>
             <a:r>
               <a:rPr lang="en-US" dirty="0"/>
-              <a:t>Finally gender bias is fairly self-explanatory. Given that sports teams are typically separated by sex, gender bias is not really studied in talent identification, and there’s  also a significant underrepresentation of girls in the literature. In the case of EA’s </a:t>
+              <a:t>Finally, gender bias. Given that sports teams are typically separated by sex, gender bias is not really studied in talent identification, and there’s also a significant underrepresentation of girls in the literature. In the case of EA’s </a:t>
             </a:r>
             <a:r>
               <a:rPr lang="en-US" dirty="0" err="1"/>
@@ -4367,7 +4359,7 @@
           <a:p>
             <a:r>
               <a:rPr lang="en-US" dirty="0"/>
-              <a:t>In order to investigate relative age effect and gender bias, I’m primarily using logistic regression with selection outcome as my binary outcome variable; applicants either being selected or not. The predictors of interest will of course be birth month, specifically birth quarter and gender. Other relevant predictors will also be included but not focused on and I will possibly include interaction terms with year-group to see if relationships change depending on the year.</a:t>
+              <a:t>To investigate relative age effect and gender bias, I’m primarily using logistic regression with selection as my binary outcome variable; with applicants either being selected or not. The predictors of interest will be birth month, specifically birth quarter and gender. Other relevant predictors will also be included but not focused on and I will possibly include interaction terms with year-group to see if relationships change depending on the year.</a:t>
             </a:r>
           </a:p>
           <a:p>
@@ -4376,7 +4368,7 @@
           <a:p>
             <a:r>
               <a:rPr lang="en-US" dirty="0"/>
-              <a:t>The table on the right shows the breakdown of applicants’ birth quarter with quarter 1 comprising September, October and November. As you can clearly see, even without incorporating the selection variable there is evidently some pattern to this. To test this more statistically I’m going to be comparing these proportions to that of the general population using a chi-square test.</a:t>
+              <a:t>The table on the right shows the breakdown of applicants’ birth quarter with quarter 1 comprising September, October and November. And you can clearly see, even without incorporating the selection variable there is some patterning to this. To test this more statistically I’m going to be comparing these proportions to that of the general population using chi-square tests.</a:t>
             </a:r>
             <a:endParaRPr lang="en-GB" dirty="0"/>
           </a:p>
@@ -4464,7 +4456,15 @@
           <a:p>
             <a:r>
               <a:rPr lang="en-US" dirty="0"/>
-              <a:t>Finally, to investigate geographical representativeness, I have been working extensively on mapping the locations of successful applicants. You can see an example of one of my earlier maps where I mapped using LSOA codes which are one of the smallest census areas available and were the only location data available in the dataset. The issue that arises from this, as you can, is that because the areas are so small, most codes only have one applicant and a small few have at most two applicants. This results in acceptance rates only taking three values which is quite uninformative when mapped.</a:t>
+              <a:t>Finally, to investigate geographical representativeness, I have been working extensively on mapping the locations of successful applicants. You can see an example of one of my earlier maps where I mapped using LSOA codes which are one of the smallest census areas available and were the only location data available in the dataset. The issue that arises from this, as you can, is that because the areas are so small, most codes only have one applicant, and a few have at </a:t>
+            </a:r>
+            <a:r>
+              <a:rPr lang="en-US"/>
+              <a:t>most two. </a:t>
+            </a:r>
+            <a:r>
+              <a:rPr lang="en-US" dirty="0"/>
+              <a:t>This results in acceptance rates only taking three values which is quite uninformative when mapped.</a:t>
             </a:r>
           </a:p>
           <a:p>
@@ -4591,6 +4591,13 @@
               <a:noFill/>
             </a:ln>
           </p:spPr>
+          <p:txBody>
+            <a:bodyPr/>
+            <a:lstStyle/>
+            <a:p>
+              <a:endParaRPr lang="en-GB"/>
+            </a:p>
+          </p:txBody>
         </p:sp>
         <p:sp>
           <p:nvSpPr>
@@ -4643,6 +4650,13 @@
               <a:noFill/>
             </a:ln>
           </p:spPr>
+          <p:txBody>
+            <a:bodyPr/>
+            <a:lstStyle/>
+            <a:p>
+              <a:endParaRPr lang="en-GB"/>
+            </a:p>
+          </p:txBody>
         </p:sp>
         <p:sp>
           <p:nvSpPr>
@@ -4689,6 +4703,13 @@
               <a:noFill/>
             </a:ln>
           </p:spPr>
+          <p:txBody>
+            <a:bodyPr/>
+            <a:lstStyle/>
+            <a:p>
+              <a:endParaRPr lang="en-GB"/>
+            </a:p>
+          </p:txBody>
         </p:sp>
         <p:sp>
           <p:nvSpPr>
@@ -4734,6 +4755,13 @@
               <a:noFill/>
             </a:ln>
           </p:spPr>
+          <p:txBody>
+            <a:bodyPr/>
+            <a:lstStyle/>
+            <a:p>
+              <a:endParaRPr lang="en-GB"/>
+            </a:p>
+          </p:txBody>
         </p:sp>
         <p:sp>
           <p:nvSpPr>
@@ -4785,6 +4813,13 @@
               <a:noFill/>
             </a:ln>
           </p:spPr>
+          <p:txBody>
+            <a:bodyPr/>
+            <a:lstStyle/>
+            <a:p>
+              <a:endParaRPr lang="en-GB"/>
+            </a:p>
+          </p:txBody>
         </p:sp>
         <p:sp>
           <p:nvSpPr>
@@ -4843,6 +4878,13 @@
               <a:noFill/>
             </a:ln>
           </p:spPr>
+          <p:txBody>
+            <a:bodyPr/>
+            <a:lstStyle/>
+            <a:p>
+              <a:endParaRPr lang="en-GB"/>
+            </a:p>
+          </p:txBody>
         </p:sp>
       </p:grpSp>
       <p:sp>
@@ -5017,7 +5059,7 @@
           <a:p>
             <a:fld id="{84BD6EB6-A736-4805-9C2A-D4103E0968D8}" type="datetimeFigureOut">
               <a:rPr lang="en-GB" smtClean="0"/>
-              <a:t>29/06/2026</a:t>
+              <a:t>30/06/2026</a:t>
             </a:fld>
             <a:endParaRPr lang="en-GB"/>
           </a:p>
@@ -5313,7 +5355,7 @@
           <a:p>
             <a:fld id="{84BD6EB6-A736-4805-9C2A-D4103E0968D8}" type="datetimeFigureOut">
               <a:rPr lang="en-GB" smtClean="0"/>
-              <a:t>29/06/2026</a:t>
+              <a:t>30/06/2026</a:t>
             </a:fld>
             <a:endParaRPr lang="en-GB"/>
           </a:p>
@@ -5561,7 +5603,7 @@
           <a:p>
             <a:fld id="{84BD6EB6-A736-4805-9C2A-D4103E0968D8}" type="datetimeFigureOut">
               <a:rPr lang="en-GB" smtClean="0"/>
-              <a:t>29/06/2026</a:t>
+              <a:t>30/06/2026</a:t>
             </a:fld>
             <a:endParaRPr lang="en-GB"/>
           </a:p>
@@ -6101,7 +6143,7 @@
           <a:p>
             <a:fld id="{84BD6EB6-A736-4805-9C2A-D4103E0968D8}" type="datetimeFigureOut">
               <a:rPr lang="en-GB" smtClean="0"/>
-              <a:t>29/06/2026</a:t>
+              <a:t>30/06/2026</a:t>
             </a:fld>
             <a:endParaRPr lang="en-GB"/>
           </a:p>
@@ -6349,7 +6391,7 @@
           <a:p>
             <a:fld id="{84BD6EB6-A736-4805-9C2A-D4103E0968D8}" type="datetimeFigureOut">
               <a:rPr lang="en-GB" smtClean="0"/>
-              <a:t>29/06/2026</a:t>
+              <a:t>30/06/2026</a:t>
             </a:fld>
             <a:endParaRPr lang="en-GB"/>
           </a:p>
@@ -6881,7 +6923,7 @@
           <a:p>
             <a:fld id="{84BD6EB6-A736-4805-9C2A-D4103E0968D8}" type="datetimeFigureOut">
               <a:rPr lang="en-GB" smtClean="0"/>
-              <a:t>29/06/2026</a:t>
+              <a:t>30/06/2026</a:t>
             </a:fld>
             <a:endParaRPr lang="en-GB"/>
           </a:p>
@@ -7178,7 +7220,7 @@
           <a:p>
             <a:fld id="{84BD6EB6-A736-4805-9C2A-D4103E0968D8}" type="datetimeFigureOut">
               <a:rPr lang="en-GB" smtClean="0"/>
-              <a:t>29/06/2026</a:t>
+              <a:t>30/06/2026</a:t>
             </a:fld>
             <a:endParaRPr lang="en-GB"/>
           </a:p>
@@ -7352,7 +7394,7 @@
           <a:p>
             <a:fld id="{84BD6EB6-A736-4805-9C2A-D4103E0968D8}" type="datetimeFigureOut">
               <a:rPr lang="en-GB" smtClean="0"/>
-              <a:t>29/06/2026</a:t>
+              <a:t>30/06/2026</a:t>
             </a:fld>
             <a:endParaRPr lang="en-GB"/>
           </a:p>
@@ -7532,7 +7574,7 @@
           <a:p>
             <a:fld id="{84BD6EB6-A736-4805-9C2A-D4103E0968D8}" type="datetimeFigureOut">
               <a:rPr lang="en-GB" smtClean="0"/>
-              <a:t>29/06/2026</a:t>
+              <a:t>30/06/2026</a:t>
             </a:fld>
             <a:endParaRPr lang="en-GB"/>
           </a:p>
@@ -7702,7 +7744,7 @@
           <a:p>
             <a:fld id="{84BD6EB6-A736-4805-9C2A-D4103E0968D8}" type="datetimeFigureOut">
               <a:rPr lang="en-GB" smtClean="0"/>
-              <a:t>29/06/2026</a:t>
+              <a:t>30/06/2026</a:t>
             </a:fld>
             <a:endParaRPr lang="en-GB"/>
           </a:p>
@@ -7953,7 +7995,7 @@
           <a:p>
             <a:fld id="{84BD6EB6-A736-4805-9C2A-D4103E0968D8}" type="datetimeFigureOut">
               <a:rPr lang="en-GB" smtClean="0"/>
-              <a:t>29/06/2026</a:t>
+              <a:t>30/06/2026</a:t>
             </a:fld>
             <a:endParaRPr lang="en-GB"/>
           </a:p>
@@ -8250,7 +8292,7 @@
           <a:p>
             <a:fld id="{84BD6EB6-A736-4805-9C2A-D4103E0968D8}" type="datetimeFigureOut">
               <a:rPr lang="en-GB" smtClean="0"/>
-              <a:t>29/06/2026</a:t>
+              <a:t>30/06/2026</a:t>
             </a:fld>
             <a:endParaRPr lang="en-GB"/>
           </a:p>
@@ -8692,7 +8734,7 @@
           <a:p>
             <a:fld id="{84BD6EB6-A736-4805-9C2A-D4103E0968D8}" type="datetimeFigureOut">
               <a:rPr lang="en-GB" smtClean="0"/>
-              <a:t>29/06/2026</a:t>
+              <a:t>30/06/2026</a:t>
             </a:fld>
             <a:endParaRPr lang="en-GB"/>
           </a:p>
@@ -8810,7 +8852,7 @@
           <a:p>
             <a:fld id="{84BD6EB6-A736-4805-9C2A-D4103E0968D8}" type="datetimeFigureOut">
               <a:rPr lang="en-GB" smtClean="0"/>
-              <a:t>29/06/2026</a:t>
+              <a:t>30/06/2026</a:t>
             </a:fld>
             <a:endParaRPr lang="en-GB"/>
           </a:p>
@@ -8905,7 +8947,7 @@
           <a:p>
             <a:fld id="{84BD6EB6-A736-4805-9C2A-D4103E0968D8}" type="datetimeFigureOut">
               <a:rPr lang="en-GB" smtClean="0"/>
-              <a:t>29/06/2026</a:t>
+              <a:t>30/06/2026</a:t>
             </a:fld>
             <a:endParaRPr lang="en-GB"/>
           </a:p>
@@ -9188,7 +9230,7 @@
           <a:p>
             <a:fld id="{84BD6EB6-A736-4805-9C2A-D4103E0968D8}" type="datetimeFigureOut">
               <a:rPr lang="en-GB" smtClean="0"/>
-              <a:t>29/06/2026</a:t>
+              <a:t>30/06/2026</a:t>
             </a:fld>
             <a:endParaRPr lang="en-GB"/>
           </a:p>
@@ -9479,7 +9521,7 @@
           <a:p>
             <a:fld id="{84BD6EB6-A736-4805-9C2A-D4103E0968D8}" type="datetimeFigureOut">
               <a:rPr lang="en-GB" smtClean="0"/>
-              <a:t>29/06/2026</a:t>
+              <a:t>30/06/2026</a:t>
             </a:fld>
             <a:endParaRPr lang="en-GB"/>
           </a:p>
@@ -9621,6 +9663,13 @@
               <a:noFill/>
             </a:ln>
           </p:spPr>
+          <p:txBody>
+            <a:bodyPr/>
+            <a:lstStyle/>
+            <a:p>
+              <a:endParaRPr lang="en-GB"/>
+            </a:p>
+          </p:txBody>
         </p:sp>
         <p:sp>
           <p:nvSpPr>
@@ -9670,6 +9719,13 @@
               <a:noFill/>
             </a:ln>
           </p:spPr>
+          <p:txBody>
+            <a:bodyPr/>
+            <a:lstStyle/>
+            <a:p>
+              <a:endParaRPr lang="en-GB"/>
+            </a:p>
+          </p:txBody>
         </p:sp>
         <p:sp>
           <p:nvSpPr>
@@ -9716,6 +9772,13 @@
               <a:noFill/>
             </a:ln>
           </p:spPr>
+          <p:txBody>
+            <a:bodyPr/>
+            <a:lstStyle/>
+            <a:p>
+              <a:endParaRPr lang="en-GB"/>
+            </a:p>
+          </p:txBody>
         </p:sp>
         <p:sp>
           <p:nvSpPr>
@@ -9761,6 +9824,13 @@
               <a:noFill/>
             </a:ln>
           </p:spPr>
+          <p:txBody>
+            <a:bodyPr/>
+            <a:lstStyle/>
+            <a:p>
+              <a:endParaRPr lang="en-GB"/>
+            </a:p>
+          </p:txBody>
         </p:sp>
         <p:sp>
           <p:nvSpPr>
@@ -9812,6 +9882,13 @@
               <a:noFill/>
             </a:ln>
           </p:spPr>
+          <p:txBody>
+            <a:bodyPr/>
+            <a:lstStyle/>
+            <a:p>
+              <a:endParaRPr lang="en-GB"/>
+            </a:p>
+          </p:txBody>
         </p:sp>
         <p:sp>
           <p:nvSpPr>
@@ -9876,6 +9953,13 @@
               <a:noFill/>
             </a:ln>
           </p:spPr>
+          <p:txBody>
+            <a:bodyPr/>
+            <a:lstStyle/>
+            <a:p>
+              <a:endParaRPr lang="en-GB"/>
+            </a:p>
+          </p:txBody>
         </p:sp>
       </p:grpSp>
       <p:sp>
@@ -10009,7 +10093,7 @@
           <a:p>
             <a:fld id="{84BD6EB6-A736-4805-9C2A-D4103E0968D8}" type="datetimeFigureOut">
               <a:rPr lang="en-GB" smtClean="0"/>
-              <a:t>29/06/2026</a:t>
+              <a:t>30/06/2026</a:t>
             </a:fld>
             <a:endParaRPr lang="en-GB"/>
           </a:p>
@@ -11118,7 +11202,7 @@
             </a:pPr>
             <a:r>
               <a:rPr lang="en-US" sz="2900" dirty="0"/>
-              <a:t>To What Extent Are ‘Selection Biases’ Present in the Recruitment of Adolescent Track and Field (Athletics) Athletes Onto England Athletics’ Youth Talent </a:t>
+              <a:t>To What Extent Are ‘Selection Biases’ Present in the Recruitment of Adolescent Track and Field Athletes Onto a Youth Talent </a:t>
             </a:r>
             <a:r>
               <a:rPr lang="en-US" sz="2900" dirty="0" err="1"/>
